--- a/Subgroups/ASX/Proposed Extension Working Materials/ASX-PlanSemantics-Briefing.pptx
+++ b/Subgroups/ASX/Proposed Extension Working Materials/ASX-PlanSemantics-Briefing.pptx
@@ -23,6 +23,7 @@
     <p:sldId id="271" r:id="rId22"/>
     <p:sldId id="272" r:id="rId23"/>
     <p:sldId id="273" r:id="rId24"/>
+    <p:sldId id="274" r:id="rId25"/>
   </p:sldIdLst>
   <p:sldSz cx="12191695" cy="6858000" type="screen4x3"/>
   <p:notesSz cx="6858000" cy="9144000"/>
@@ -3255,7 +3256,7 @@
                 </a:solidFill>
                 <a:latin typeface="Calibri"/>
               </a:rPr>
-              <a:t>Companion artifacts: Plan-Semantics-Analysis.md  +  ASX-PlanSemantics-Draft.ttl (v0.0.2)</a:t>
+              <a:t>Companion artifacts: Plan-Semantics-Analysis.md  +  ASX-PlanSemantics-Draft.ttl (v0.0.3)</a:t>
             </a:r>
           </a:p>
         </p:txBody>
@@ -4008,7 +4009,7 @@
                 </a:solidFill>
                 <a:latin typeface="Calibri"/>
               </a:rPr>
-              <a:t>OWL restrictions alone cannot say “failure beats completion when both are satisfiable, judged on event times” (R6). Without R1–R14, two conformant implementations disagree about the same plan.</a:t>
+              <a:t>OWL restrictions alone cannot say 'failure beats completion when both are satisfiable, judged on event times' (R6). Without R1-R19, two conformant implementations disagree about the same plan.</a:t>
             </a:r>
           </a:p>
         </p:txBody>
@@ -7519,7 +7520,7 @@
                 </a:solidFill>
                 <a:latin typeface="Calibri"/>
               </a:rPr>
-              <a:t>What we ask the group to evaluate</a:t>
+              <a:t>v0.0.3 - validation + standards verification applied</a:t>
             </a:r>
           </a:p>
         </p:txBody>
@@ -7553,7 +7554,7 @@
                 </a:solidFill>
                 <a:latin typeface="Calibri"/>
               </a:rPr>
-              <a:t>And the proposed sequence if the direction holds</a:t>
+              <a:t>Nine walk deltas + six standards-matrix additions; rules R15-R19</a:t>
             </a:r>
           </a:p>
         </p:txBody>
@@ -7586,13 +7587,13 @@
               </a:spcAft>
             </a:pPr>
             <a:r>
-              <a:rPr sz="1550" b="1" i="0">
+              <a:rPr sz="1400" b="0" i="0">
                 <a:solidFill>
                   <a:srgbClr val="333333"/>
                 </a:solidFill>
                 <a:latin typeface="Calibri"/>
               </a:rPr>
-              <a:t>•  1.  Direction — extend the LOX Plan (additive ASX module) rather than a freestanding behavior ontology. Agree?</a:t>
+              <a:t>•  Three validation walks (CASEVAC, DroneResponse, MDARS) instantiate end-to-end; no structural defects; all nine walk deltas are now applied in TTL v0.0.3.</a:t>
             </a:r>
           </a:p>
           <a:p>
@@ -7602,13 +7603,13 @@
               </a:spcAft>
             </a:pPr>
             <a:r>
-              <a:rPr sz="1550" b="1" i="0">
+              <a:rPr sz="1400" b="0" i="0">
                 <a:solidFill>
                   <a:srgbClr val="333333"/>
                 </a:solidFill>
                 <a:latin typeface="Calibri"/>
               </a:rPr>
-              <a:t>•  2.  The interop posture — fail-closed unknown triggers + capability negotiation for gating constructs. Acceptable operationally?</a:t>
+              <a:t>•  An independent standards pass (BT/Nav2, PDDL, FlexBE, MAVLink, IEEE, JAUS, STANAG) re-derived the same construct set - convergent corroboration of the module's design, not new invention.</a:t>
             </a:r>
           </a:p>
           <a:p>
@@ -7618,77 +7619,109 @@
               </a:spcAft>
             </a:pPr>
             <a:r>
-              <a:rPr sz="1550" b="1" i="0">
+              <a:rPr sz="1400" b="1" i="0">
                 <a:solidFill>
                   <a:srgbClr val="333333"/>
                 </a:solidFill>
                 <a:latin typeface="Calibri"/>
               </a:rPr>
-              <a:t>•  3.  The condition vocabulary — right size? (typed predicates, no expression language; 12 initial predicates, scenario-driven growth)</a:t>
-            </a:r>
-          </a:p>
-          <a:p>
-            <a:pPr>
+              <a:t>•  New in v0.0.3 - each with prior art:</a:t>
+            </a:r>
+          </a:p>
+          <a:p>
+            <a:pPr lvl="1">
               <a:spcAft>
                 <a:spcPts val="600"/>
               </a:spcAft>
             </a:pPr>
             <a:r>
-              <a:rPr sz="1550" b="1" i="0">
+              <a:rPr sz="1300" b="0" i="0">
                 <a:solidFill>
                   <a:srgbClr val="333333"/>
                 </a:solidFill>
                 <a:latin typeface="Calibri"/>
               </a:rPr>
-              <a:t>•  4.  Core errata to raise with the PDG — TASKFAILD, task cancel/suspend verbs, runtime event-occurrence report.</a:t>
-            </a:r>
-          </a:p>
-          <a:p>
-            <a:pPr>
+              <a:t>–  plan identity + supersession: hasPlanID / hasSupersededPlanReference, rule R16 (JAUS AS6062 mission IDs)</a:t>
+            </a:r>
+          </a:p>
+          <a:p>
+            <a:pPr lvl="1">
               <a:spcAft>
                 <a:spcPts val="600"/>
               </a:spcAft>
             </a:pPr>
             <a:r>
-              <a:rPr sz="1450" b="0" i="0">
+              <a:rPr sz="1300" b="0" i="0">
                 <a:solidFill>
                   <a:srgbClr val="333333"/>
                 </a:solidFill>
                 <a:latin typeface="Calibri"/>
               </a:rPr>
-              <a:t>•  Proposed sequence: Condition + triggers (Q-D, Q-N)  →  HumanApprovalTrigger + LoA linkage (W1/Q-K)  →  Goal / plan library  →  report contents (X2, X6).</a:t>
-            </a:r>
-          </a:p>
-          <a:p>
-            <a:pPr>
+              <a:t>–  PhaseSuspended outcome + TASKSUSP, rule R17 (JAUS Pause/Resume Mission)</a:t>
+            </a:r>
+          </a:p>
+          <a:p>
+            <a:pPr lvl="1">
               <a:spcAft>
                 <a:spcPts val="600"/>
               </a:spcAft>
             </a:pPr>
             <a:r>
-              <a:rPr sz="1450" b="0" i="0">
+              <a:rPr sz="1300" b="0" i="0">
                 <a:solidFill>
                   <a:srgbClr val="333333"/>
                 </a:solidFill>
                 <a:latin typeface="Calibri"/>
               </a:rPr>
-              <a:t>•  Prerequisites from the instantiation review: Swarm ⊑ CollectiveEntity (P7); attach hasAutonomousRoleCode (P3).</a:t>
-            </a:r>
-          </a:p>
-          <a:p>
-            <a:pPr>
+              <a:t>–  TASKACPT / TASKRJCT + TaskDispositionReportContent - per-task accept/reject with a machine-readable infeasibility condition</a:t>
+            </a:r>
+          </a:p>
+          <a:p>
+            <a:pPr lvl="1">
               <a:spcAft>
                 <a:spcPts val="600"/>
               </a:spcAft>
             </a:pPr>
             <a:r>
-              <a:rPr sz="1450" b="0" i="0">
+              <a:rPr sz="1300" b="0" i="0">
                 <a:solidFill>
                   <a:srgbClr val="333333"/>
                 </a:solidFill>
                 <a:latin typeface="Calibri"/>
               </a:rPr>
-              <a:t>•  Next artifact: instantiation-review-style walks of CASEVAC + DroneResponse + MDARS in the module vocabulary, before advancing the OWL.</a:t>
+              <a:t>–  lost-link failsafe floor (FailsafeBehaviorCode, rule R18) + EntityInsideArea keep-in/keep-out guards (STANAG lost-link, MAVLink fence/rally)</a:t>
+            </a:r>
+          </a:p>
+          <a:p>
+            <a:pPr lvl="1">
+              <a:spcAft>
+                <a:spcPts val="600"/>
+              </a:spcAft>
+            </a:pPr>
+            <a:r>
+              <a:rPr sz="1300" b="0" i="0">
+                <a:solidFill>
+                  <a:srgbClr val="333333"/>
+                </a:solidFill>
+                <a:latin typeface="Calibri"/>
+              </a:rPr>
+              <a:t>–  StructuredRoute waypoints: explicit sequence, per-point speed / arrival / loiter, task-on-arrival, rule R19 (STANAG 4586 #13002-#13004)</a:t>
+            </a:r>
+          </a:p>
+          <a:p>
+            <a:pPr lvl="1">
+              <a:spcAft>
+                <a:spcPts val="600"/>
+              </a:spcAft>
+            </a:pPr>
+            <a:r>
+              <a:rPr sz="1300" b="0" i="0">
+                <a:solidFill>
+                  <a:srgbClr val="333333"/>
+                </a:solidFill>
+                <a:latin typeface="Calibri"/>
+              </a:rPr>
+              <a:t>–  hasRepetitionInterval (revisit cadence) + predicates PayloadOnBoard, RemainingEnduranceBelow, EntityImmobilized</a:t>
             </a:r>
           </a:p>
         </p:txBody>
@@ -7701,8 +7734,8 @@
         </p:nvSpPr>
         <p:spPr>
           <a:xfrm>
-            <a:off x="640080" y="5486400"/>
-            <a:ext cx="10972800" cy="777240"/>
+            <a:off x="640080" y="5074920"/>
+            <a:ext cx="10972800" cy="1188720"/>
           </a:xfrm>
           <a:prstGeom prst="roundRect">
             <a:avLst/>
@@ -7745,8 +7778,8 @@
         </p:nvSpPr>
         <p:spPr>
           <a:xfrm>
-            <a:off x="777240" y="5559552"/>
-            <a:ext cx="10698480" cy="630936"/>
+            <a:off x="777240" y="5148072"/>
+            <a:ext cx="10698480" cy="1042416"/>
           </a:xfrm>
           <a:prstGeom prst="rect">
             <a:avLst/>
@@ -7766,7 +7799,7 @@
                 </a:solidFill>
                 <a:latin typeface="Calibri"/>
               </a:rPr>
-              <a:t/>
+              <a:t>Also settled</a:t>
             </a:r>
           </a:p>
           <a:p>
@@ -7778,11 +7811,27 @@
             <a:r>
               <a:rPr sz="1300" b="0" i="0">
                 <a:solidFill>
-                  <a:srgbClr val="1F3A5F"/>
-                </a:solidFill>
-                <a:latin typeface="Calibri"/>
-              </a:rPr>
-              <a:t>Artifacts: Plan-Semantics-Analysis.md (analysis, rules, limitations)  •  ASX-PlanSemantics-Draft.ttl v0.0.2 (618 triples, validated)  •  this deck</a:t>
+                  <a:srgbClr val="333333"/>
+                </a:solidFill>
+                <a:latin typeface="Calibri"/>
+              </a:rPr>
+              <a:t>Correction: standards alignment is IEEE 1872.1-2024 only - 1872.2 verifiably defines no plan constructs.</a:t>
+            </a:r>
+          </a:p>
+          <a:p>
+            <a:pPr>
+              <a:spcBef>
+                <a:spcPts val="300"/>
+              </a:spcBef>
+            </a:pPr>
+            <a:r>
+              <a:rPr sz="1300" b="0" i="0">
+                <a:solidFill>
+                  <a:srgbClr val="666666"/>
+                </a:solidFill>
+                <a:latin typeface="Calibri"/>
+              </a:rPr>
+              <a:t>Candidate core errata consolidated for the PDG in PDG-Change-Proposals.md (TASKFAILD, handshake/suspension codes, control verbs, event-occurrence report, LOX errata, plan identity).</a:t>
             </a:r>
           </a:p>
         </p:txBody>
@@ -7852,6 +7901,433 @@
                 <a:latin typeface="Calibri"/>
               </a:rPr>
               <a:t>18</a:t>
+            </a:r>
+          </a:p>
+        </p:txBody>
+      </p:sp>
+    </p:spTree>
+  </p:cSld>
+  <p:clrMapOvr>
+    <a:masterClrMapping/>
+  </p:clrMapOvr>
+</p:sld>
+</file>
+
+<file path=ppt/slides/slide19.xml><?xml version="1.0" encoding="utf-8"?>
+<p:sld xmlns:a="http://schemas.openxmlformats.org/drawingml/2006/main" xmlns:p="http://schemas.openxmlformats.org/presentationml/2006/main" xmlns:r="http://schemas.openxmlformats.org/officeDocument/2006/relationships">
+  <p:cSld>
+    <p:spTree>
+      <p:nvGrpSpPr>
+        <p:cNvPr id="1" name=""/>
+        <p:cNvGrpSpPr/>
+        <p:nvPr/>
+      </p:nvGrpSpPr>
+      <p:grpSpPr/>
+      <p:sp>
+        <p:nvSpPr>
+          <p:cNvPr id="2" name="Rectangle 1"/>
+          <p:cNvSpPr/>
+          <p:nvPr/>
+        </p:nvSpPr>
+        <p:spPr>
+          <a:xfrm>
+            <a:off x="548640" y="1170432"/>
+            <a:ext cx="2011680" cy="38100"/>
+          </a:xfrm>
+          <a:prstGeom prst="rect">
+            <a:avLst/>
+          </a:prstGeom>
+          <a:solidFill>
+            <a:srgbClr val="2E869A"/>
+          </a:solidFill>
+          <a:ln>
+            <a:noFill/>
+          </a:ln>
+        </p:spPr>
+        <p:style>
+          <a:lnRef idx="1">
+            <a:schemeClr val="accent1"/>
+          </a:lnRef>
+          <a:fillRef idx="3">
+            <a:schemeClr val="accent1"/>
+          </a:fillRef>
+          <a:effectRef idx="2">
+            <a:schemeClr val="accent1"/>
+          </a:effectRef>
+          <a:fontRef idx="minor">
+            <a:schemeClr val="lt1"/>
+          </a:fontRef>
+        </p:style>
+        <p:txBody>
+          <a:bodyPr rtlCol="0" anchor="ctr"/>
+          <a:lstStyle/>
+          <a:p>
+            <a:pPr algn="ctr"/>
+          </a:p>
+        </p:txBody>
+      </p:sp>
+      <p:sp>
+        <p:nvSpPr>
+          <p:cNvPr id="3" name="TextBox 2"/>
+          <p:cNvSpPr txBox="1"/>
+          <p:nvPr/>
+        </p:nvSpPr>
+        <p:spPr>
+          <a:xfrm>
+            <a:off x="502920" y="411480"/>
+            <a:ext cx="11155680" cy="822960"/>
+          </a:xfrm>
+          <a:prstGeom prst="rect">
+            <a:avLst/>
+          </a:prstGeom>
+          <a:noFill/>
+        </p:spPr>
+        <p:txBody>
+          <a:bodyPr wrap="square">
+            <a:spAutoFit/>
+          </a:bodyPr>
+          <a:lstStyle/>
+          <a:p>
+            <a:r>
+              <a:rPr sz="3000" b="1" i="0">
+                <a:solidFill>
+                  <a:srgbClr val="1F3A5F"/>
+                </a:solidFill>
+                <a:latin typeface="Calibri"/>
+              </a:rPr>
+              <a:t>What we ask the group to evaluate</a:t>
+            </a:r>
+          </a:p>
+        </p:txBody>
+      </p:sp>
+      <p:sp>
+        <p:nvSpPr>
+          <p:cNvPr id="4" name="TextBox 3"/>
+          <p:cNvSpPr txBox="1"/>
+          <p:nvPr/>
+        </p:nvSpPr>
+        <p:spPr>
+          <a:xfrm>
+            <a:off x="548640" y="914400"/>
+            <a:ext cx="10972800" cy="320040"/>
+          </a:xfrm>
+          <a:prstGeom prst="rect">
+            <a:avLst/>
+          </a:prstGeom>
+          <a:noFill/>
+        </p:spPr>
+        <p:txBody>
+          <a:bodyPr wrap="square">
+            <a:spAutoFit/>
+          </a:bodyPr>
+          <a:lstStyle/>
+          <a:p>
+            <a:r>
+              <a:rPr sz="1300" b="0" i="1">
+                <a:solidFill>
+                  <a:srgbClr val="2E869A"/>
+                </a:solidFill>
+                <a:latin typeface="Calibri"/>
+              </a:rPr>
+              <a:t>And the proposed sequence if the direction holds</a:t>
+            </a:r>
+          </a:p>
+        </p:txBody>
+      </p:sp>
+      <p:sp>
+        <p:nvSpPr>
+          <p:cNvPr id="5" name="TextBox 4"/>
+          <p:cNvSpPr txBox="1"/>
+          <p:nvPr/>
+        </p:nvSpPr>
+        <p:spPr>
+          <a:xfrm>
+            <a:off x="640080" y="1463040"/>
+            <a:ext cx="10972800" cy="4754880"/>
+          </a:xfrm>
+          <a:prstGeom prst="rect">
+            <a:avLst/>
+          </a:prstGeom>
+          <a:noFill/>
+        </p:spPr>
+        <p:txBody>
+          <a:bodyPr wrap="square">
+            <a:spAutoFit/>
+          </a:bodyPr>
+          <a:lstStyle/>
+          <a:p>
+            <a:pPr>
+              <a:spcAft>
+                <a:spcPts val="600"/>
+              </a:spcAft>
+            </a:pPr>
+            <a:r>
+              <a:rPr sz="1550" b="1" i="0">
+                <a:solidFill>
+                  <a:srgbClr val="333333"/>
+                </a:solidFill>
+                <a:latin typeface="Calibri"/>
+              </a:rPr>
+              <a:t>•  1.  Direction — extend the LOX Plan (additive ASX module) rather than a freestanding behavior ontology. Agree?</a:t>
+            </a:r>
+          </a:p>
+          <a:p>
+            <a:pPr>
+              <a:spcAft>
+                <a:spcPts val="600"/>
+              </a:spcAft>
+            </a:pPr>
+            <a:r>
+              <a:rPr sz="1550" b="1" i="0">
+                <a:solidFill>
+                  <a:srgbClr val="333333"/>
+                </a:solidFill>
+                <a:latin typeface="Calibri"/>
+              </a:rPr>
+              <a:t>•  2.  The interop posture — fail-closed unknown triggers + capability negotiation for gating constructs. Acceptable operationally?</a:t>
+            </a:r>
+          </a:p>
+          <a:p>
+            <a:pPr>
+              <a:spcAft>
+                <a:spcPts val="600"/>
+              </a:spcAft>
+            </a:pPr>
+            <a:r>
+              <a:rPr sz="1550" b="1" i="0">
+                <a:solidFill>
+                  <a:srgbClr val="333333"/>
+                </a:solidFill>
+                <a:latin typeface="Calibri"/>
+              </a:rPr>
+              <a:t>•  3.  The condition vocabulary - right size? (typed predicates, no expression language; 16 predicates after the v0.0.3 additions, scenario-driven growth)</a:t>
+            </a:r>
+          </a:p>
+          <a:p>
+            <a:pPr>
+              <a:spcAft>
+                <a:spcPts val="600"/>
+              </a:spcAft>
+            </a:pPr>
+            <a:r>
+              <a:rPr sz="1550" b="1" i="0">
+                <a:solidFill>
+                  <a:srgbClr val="333333"/>
+                </a:solidFill>
+                <a:latin typeface="Calibri"/>
+              </a:rPr>
+              <a:t>•  4.  Core errata to raise with the PDG — TASKFAILD, task cancel/suspend verbs, runtime event-occurrence report.</a:t>
+            </a:r>
+          </a:p>
+          <a:p>
+            <a:pPr>
+              <a:spcAft>
+                <a:spcPts val="600"/>
+              </a:spcAft>
+            </a:pPr>
+            <a:r>
+              <a:rPr sz="1450" b="0" i="0">
+                <a:solidFill>
+                  <a:srgbClr val="333333"/>
+                </a:solidFill>
+                <a:latin typeface="Calibri"/>
+              </a:rPr>
+              <a:t>•  Proposed sequence: Condition + triggers (Q-D, Q-N)  →  HumanApprovalTrigger + LoA linkage (W1/Q-K)  →  Goal / plan library  →  report contents (X2, X6).</a:t>
+            </a:r>
+          </a:p>
+          <a:p>
+            <a:pPr>
+              <a:spcAft>
+                <a:spcPts val="600"/>
+              </a:spcAft>
+            </a:pPr>
+            <a:r>
+              <a:rPr sz="1450" b="0" i="0">
+                <a:solidFill>
+                  <a:srgbClr val="333333"/>
+                </a:solidFill>
+                <a:latin typeface="Calibri"/>
+              </a:rPr>
+              <a:t>•  Prerequisites from the instantiation review: Swarm ⊑ CollectiveEntity (P7); attach hasAutonomousRoleCode (P3).</a:t>
+            </a:r>
+          </a:p>
+          <a:p>
+            <a:pPr>
+              <a:spcAft>
+                <a:spcPts val="600"/>
+              </a:spcAft>
+            </a:pPr>
+            <a:r>
+              <a:rPr sz="1450" b="0" i="0">
+                <a:solidFill>
+                  <a:srgbClr val="333333"/>
+                </a:solidFill>
+                <a:latin typeface="Calibri"/>
+              </a:rPr>
+              <a:t>•  Next artifact: instantiation-review-style walks of CASEVAC + DroneResponse + MDARS in the module vocabulary, before advancing the OWL.</a:t>
+            </a:r>
+          </a:p>
+        </p:txBody>
+      </p:sp>
+      <p:sp>
+        <p:nvSpPr>
+          <p:cNvPr id="6" name="Rounded Rectangle 5"/>
+          <p:cNvSpPr/>
+          <p:nvPr/>
+        </p:nvSpPr>
+        <p:spPr>
+          <a:xfrm>
+            <a:off x="640080" y="5486400"/>
+            <a:ext cx="10972800" cy="777240"/>
+          </a:xfrm>
+          <a:prstGeom prst="roundRect">
+            <a:avLst/>
+          </a:prstGeom>
+          <a:solidFill>
+            <a:srgbClr val="EEF1F5"/>
+          </a:solidFill>
+          <a:ln>
+            <a:noFill/>
+          </a:ln>
+          <a:effectLst/>
+        </p:spPr>
+        <p:style>
+          <a:lnRef idx="1">
+            <a:schemeClr val="accent1"/>
+          </a:lnRef>
+          <a:fillRef idx="3">
+            <a:schemeClr val="accent1"/>
+          </a:fillRef>
+          <a:effectRef idx="2">
+            <a:schemeClr val="accent1"/>
+          </a:effectRef>
+          <a:fontRef idx="minor">
+            <a:schemeClr val="lt1"/>
+          </a:fontRef>
+        </p:style>
+        <p:txBody>
+          <a:bodyPr rtlCol="0" anchor="ctr"/>
+          <a:lstStyle/>
+          <a:p>
+            <a:pPr algn="ctr"/>
+          </a:p>
+        </p:txBody>
+      </p:sp>
+      <p:sp>
+        <p:nvSpPr>
+          <p:cNvPr id="7" name="TextBox 6"/>
+          <p:cNvSpPr txBox="1"/>
+          <p:nvPr/>
+        </p:nvSpPr>
+        <p:spPr>
+          <a:xfrm>
+            <a:off x="777240" y="5559552"/>
+            <a:ext cx="10698480" cy="630936"/>
+          </a:xfrm>
+          <a:prstGeom prst="rect">
+            <a:avLst/>
+          </a:prstGeom>
+          <a:noFill/>
+        </p:spPr>
+        <p:txBody>
+          <a:bodyPr wrap="square">
+            <a:spAutoFit/>
+          </a:bodyPr>
+          <a:lstStyle/>
+          <a:p>
+            <a:r>
+              <a:rPr sz="1500" b="1" i="0">
+                <a:solidFill>
+                  <a:srgbClr val="1F3A5F"/>
+                </a:solidFill>
+                <a:latin typeface="Calibri"/>
+              </a:rPr>
+              <a:t/>
+            </a:r>
+          </a:p>
+          <a:p>
+            <a:pPr>
+              <a:spcBef>
+                <a:spcPts val="300"/>
+              </a:spcBef>
+            </a:pPr>
+            <a:r>
+              <a:rPr sz="1300" b="0" i="0">
+                <a:solidFill>
+                  <a:srgbClr val="1F3A5F"/>
+                </a:solidFill>
+                <a:latin typeface="Calibri"/>
+              </a:rPr>
+              <a:t>Artifacts: Plan-Semantics-Analysis.md (analysis, rules, limitations)  -  ASX-PlanSemantics-Draft.ttl v0.0.3 (800+ triples, validated)  -  this deck</a:t>
+            </a:r>
+          </a:p>
+        </p:txBody>
+      </p:sp>
+      <p:sp>
+        <p:nvSpPr>
+          <p:cNvPr id="8" name="TextBox 7"/>
+          <p:cNvSpPr txBox="1"/>
+          <p:nvPr/>
+        </p:nvSpPr>
+        <p:spPr>
+          <a:xfrm>
+            <a:off x="502920" y="6419088"/>
+            <a:ext cx="11155680" cy="320040"/>
+          </a:xfrm>
+          <a:prstGeom prst="rect">
+            <a:avLst/>
+          </a:prstGeom>
+          <a:noFill/>
+        </p:spPr>
+        <p:txBody>
+          <a:bodyPr wrap="square">
+            <a:spAutoFit/>
+          </a:bodyPr>
+          <a:lstStyle/>
+          <a:p>
+            <a:r>
+              <a:rPr sz="900" b="0" i="0">
+                <a:solidFill>
+                  <a:srgbClr val="666666"/>
+                </a:solidFill>
+                <a:latin typeface="Calibri"/>
+              </a:rPr>
+              <a:t>C2SIM ASX Sub-group   |   Plan-Semantics Working Brief (DRAFT)   |   July 2026</a:t>
+            </a:r>
+          </a:p>
+        </p:txBody>
+      </p:sp>
+      <p:sp>
+        <p:nvSpPr>
+          <p:cNvPr id="9" name="TextBox 8"/>
+          <p:cNvSpPr txBox="1"/>
+          <p:nvPr/>
+        </p:nvSpPr>
+        <p:spPr>
+          <a:xfrm>
+            <a:off x="11338560" y="6419088"/>
+            <a:ext cx="640080" cy="320040"/>
+          </a:xfrm>
+          <a:prstGeom prst="rect">
+            <a:avLst/>
+          </a:prstGeom>
+          <a:noFill/>
+        </p:spPr>
+        <p:txBody>
+          <a:bodyPr wrap="square">
+            <a:spAutoFit/>
+          </a:bodyPr>
+          <a:lstStyle/>
+          <a:p>
+            <a:pPr algn="r"/>
+            <a:r>
+              <a:rPr sz="900" b="0" i="0">
+                <a:solidFill>
+                  <a:srgbClr val="666666"/>
+                </a:solidFill>
+                <a:latin typeface="Calibri"/>
+              </a:rPr>
+              <a:t>19</a:t>
             </a:r>
           </a:p>
         </p:txBody>
@@ -12301,7 +12777,7 @@
                 </a:solidFill>
                 <a:latin typeface="Calibri"/>
               </a:rPr>
-              <a:t>asx/plan v0.0.2 draft — OWL (Turtle) + 14 normative execution rules</a:t>
+              <a:t>asx/plan v0.0.3 draft - OWL (Turtle) + 19 normative execution rules</a:t>
             </a:r>
           </a:p>
         </p:txBody>
@@ -12665,7 +13141,7 @@
                 </a:solidFill>
                 <a:latin typeface="Calibri"/>
               </a:rPr>
-              <a:t>Condition: 12 typed, negatable predicates</a:t>
+              <a:t>Condition: 16 typed, negatable predicates</a:t>
             </a:r>
           </a:p>
           <a:p>
@@ -12917,7 +13393,7 @@
                 </a:solidFill>
                 <a:latin typeface="Calibri"/>
               </a:rPr>
-              <a:t>Layering: C2SIM core → SMX → LOX → asx/plan (owl:imports).  Everything is optional on top of a plain LOX plan; OWL vocabulary + rules R1–R14 together are the proposal.</a:t>
+              <a:t>Layering: C2SIM core -&gt; SMX -&gt; LOX -&gt; asx/plan (owl:imports).  Everything is optional on top of a plain LOX plan; OWL vocabulary + rules R1-R19 together are the proposal.</a:t>
             </a:r>
           </a:p>
         </p:txBody>
